--- a/content/Lectures/Semester 1/Week 06 - Integer Linear Programming - Further Problems/5 Source Files/Week 6 - Integer Linear Programming - Further Problems.pptx
+++ b/content/Lectures/Semester 1/Week 06 - Integer Linear Programming - Further Problems/5 Source Files/Week 6 - Integer Linear Programming - Further Problems.pptx
@@ -4678,7 +4678,7 @@
             </a:pPr>
             <a:r>
               <a:rPr lang="en-GB"/>
-              <a:t>Find a the minimum number of edges that cover the vertices…</a:t>
+              <a:t>Find the minimum number of edges that cover the vertices…</a:t>
             </a:r>
           </a:p>
           <a:p>
@@ -5196,7 +5196,7 @@
           <a:p>
             <a:r>
               <a:rPr lang="en-GB"/>
-              <a:t>The following example is from </a:t>
+              <a:t>The following example is adapted from </a:t>
             </a:r>
             <a:r>
               <a:rPr lang="en-GB">
@@ -14975,7 +14975,7 @@
               <a:p>
                 <a:r>
                   <a:rPr lang="en-GB"/>
-                  <a:t>This is a bi-partite graph and requires a perfect matching…</a:t>
+                  <a:t>This is a bipartite graph and requires a perfect matching…</a:t>
                 </a:r>
               </a:p>
               <a:p>
@@ -17299,7 +17299,7 @@
               <a:p>
                 <a:r>
                   <a:rPr lang="en-GB"/>
-                  <a:t>This is a bi-partite graph and requires a perfect matching…</a:t>
+                  <a:t>This is a bipartite graph and requires a perfect matching…</a:t>
                 </a:r>
               </a:p>
               <a:p>
@@ -17470,7 +17470,7 @@
           <a:p>
             <a:r>
               <a:rPr lang="en-GB"/>
-              <a:t>Pick 1 Per Row and 1 Per column</a:t>
+              <a:t>Pick 1 per row and 1 per column</a:t>
             </a:r>
           </a:p>
         </p:txBody>
@@ -19338,7 +19338,7 @@
                             <a:rPr lang="en-GB" b="0" i="1" smtClean="0">
                               <a:latin typeface="Cambria Math" panose="02040503050406030204" pitchFamily="18" charset="0"/>
                             </a:rPr>
-                            <m:t>𝑗</m:t>
+                            <m:t>𝐽</m:t>
                           </m:r>
                         </m:sub>
                         <m:sup/>
@@ -20389,7 +20389,7 @@
               <a:p>
                 <a:r>
                   <a:rPr lang="en-GB"/>
-                  <a:t>This is a bi-partite graph and requires a perfect matching…</a:t>
+                  <a:t>This is a bipartite graph and requires a perfect matching…</a:t>
                 </a:r>
               </a:p>
               <a:p>
@@ -22661,7 +22661,7 @@
               <a:pPr algn="ctr"/>
               <a:r>
                 <a:rPr lang="en-GB"/>
-                <a:t>s1</a:t>
+                <a:t>s2</a:t>
               </a:r>
             </a:p>
           </p:txBody>
@@ -22711,7 +22711,7 @@
               <a:pPr algn="ctr"/>
               <a:r>
                 <a:rPr lang="en-GB"/>
-                <a:t>s1</a:t>
+                <a:t>s3</a:t>
               </a:r>
             </a:p>
           </p:txBody>
@@ -23612,7 +23612,7 @@
               <a:rPr lang="en-GB">
                 <a:cs typeface="Courier New" panose="02070309020205020404" pitchFamily="49" charset="0"/>
               </a:rPr>
-              <a:t>Try coding these yourself.</a:t>
+              <a:t>Try coding the problems below yourself.</a:t>
             </a:r>
           </a:p>
           <a:p>
@@ -23631,7 +23631,7 @@
               <a:rPr lang="en-GB">
                 <a:cs typeface="Courier New" panose="02070309020205020404" pitchFamily="49" charset="0"/>
               </a:rPr>
-              <a:t>Look up other problems such as.</a:t>
+              <a:t>Look up other problems, such as:</a:t>
             </a:r>
           </a:p>
           <a:p>
@@ -23647,7 +23647,7 @@
               <a:rPr lang="en-GB">
                 <a:cs typeface="Courier New" panose="02070309020205020404" pitchFamily="49" charset="0"/>
               </a:rPr>
-              <a:t>Maximum Edge Cover</a:t>
+              <a:t>Minimum Edge Cover</a:t>
             </a:r>
           </a:p>
           <a:p>
@@ -24954,7 +24954,7 @@
                       <a:rPr lang="en-GB" sz="2400" b="0" i="1" smtClean="0">
                         <a:latin typeface="Cambria Math" panose="02040503050406030204" pitchFamily="18" charset="0"/>
                       </a:rPr>
-                      <m:t>𝑠</m:t>
+                      <m:t>𝑡</m:t>
                     </m:r>
                   </m:oMath>
                 </a14:m>
@@ -27535,7 +27535,7 @@
                             <a:rPr lang="en-GB" sz="2400" i="1">
                               <a:latin typeface="Cambria Math" panose="02040503050406030204" pitchFamily="18" charset="0"/>
                             </a:rPr>
-                            <m:t>𝑠</m:t>
+                            <m:t>𝑡</m:t>
                           </m:r>
                         </m:sub>
                       </m:sSub>
@@ -28202,7 +28202,7 @@
                 </a:r>
                 <a:r>
                   <a:rPr lang="en-GB" dirty="0" err="1"/>
-                  <a:t>firestations</a:t>
+                  <a:t>fire stations</a:t>
                 </a:r>
                 <a:r>
                   <a:rPr lang="en-GB" dirty="0"/>
@@ -28257,7 +28257,7 @@
                 </a:r>
                 <a:r>
                   <a:rPr lang="en-GB" dirty="0" err="1"/>
-                  <a:t>firestation</a:t>
+                  <a:t>fire station</a:t>
                 </a:r>
                 <a:r>
                   <a:rPr lang="en-GB" dirty="0"/>
@@ -28313,7 +28313,7 @@
                 </a:r>
                 <a:r>
                   <a:rPr lang="en-GB" dirty="0" err="1"/>
-                  <a:t>firestation</a:t>
+                  <a:t>fire station</a:t>
                 </a:r>
                 <a:r>
                   <a:rPr lang="en-GB" dirty="0"/>
@@ -28370,7 +28370,7 @@
                 </a:r>
                 <a:r>
                   <a:rPr lang="en-GB" dirty="0" err="1"/>
-                  <a:t>firestation</a:t>
+                  <a:t>fire station</a:t>
                 </a:r>
                 <a:r>
                   <a:rPr lang="en-GB" dirty="0"/>
@@ -29241,7 +29241,7 @@
                 </a:r>
                 <a:r>
                   <a:rPr lang="en-GB" dirty="0" err="1"/>
-                  <a:t>firestations</a:t>
+                  <a:t>fire stations</a:t>
                 </a:r>
                 <a:r>
                   <a:rPr lang="en-GB" dirty="0"/>
@@ -29296,7 +29296,7 @@
                 </a:r>
                 <a:r>
                   <a:rPr lang="en-GB" dirty="0" err="1"/>
-                  <a:t>firestation</a:t>
+                  <a:t>fire station</a:t>
                 </a:r>
                 <a:r>
                   <a:rPr lang="en-GB" dirty="0"/>
@@ -29352,7 +29352,7 @@
                 </a:r>
                 <a:r>
                   <a:rPr lang="en-GB" dirty="0" err="1"/>
-                  <a:t>firestation</a:t>
+                  <a:t>fire station</a:t>
                 </a:r>
                 <a:r>
                   <a:rPr lang="en-GB" dirty="0"/>
@@ -29409,7 +29409,7 @@
                 </a:r>
                 <a:r>
                   <a:rPr lang="en-GB" dirty="0" err="1"/>
-                  <a:t>firestation</a:t>
+                  <a:t>fire station</a:t>
                 </a:r>
                 <a:r>
                   <a:rPr lang="en-GB" dirty="0"/>
@@ -31069,7 +31069,7 @@
                             <a:rPr lang="en-GB" sz="1800" b="0" i="1" smtClean="0">
                               <a:latin typeface="Cambria Math" panose="02040503050406030204" pitchFamily="18" charset="0"/>
                             </a:rPr>
-                            <m:t>𝑠</m:t>
+                            <m:t>𝑡</m:t>
                           </m:r>
                         </m:sub>
                       </m:sSub>
@@ -31464,7 +31464,7 @@
                 </a:r>
                 <a:r>
                   <a:rPr lang="en-GB" err="1"/>
-                  <a:t>firestations</a:t>
+                  <a:t>fire stations</a:t>
                 </a:r>
                 <a:r>
                   <a:rPr lang="en-GB"/>
@@ -31519,7 +31519,7 @@
                 </a:r>
                 <a:r>
                   <a:rPr lang="en-GB" err="1"/>
-                  <a:t>firestation</a:t>
+                  <a:t>fire station</a:t>
                 </a:r>
                 <a:r>
                   <a:rPr lang="en-GB"/>
@@ -31594,7 +31594,7 @@
                 </a:r>
                 <a:r>
                   <a:rPr lang="en-GB" err="1"/>
-                  <a:t>firestation</a:t>
+                  <a:t>fire station</a:t>
                 </a:r>
                 <a:r>
                   <a:rPr lang="en-GB"/>
@@ -31670,7 +31670,7 @@
                 </a:r>
                 <a:r>
                   <a:rPr lang="en-GB" err="1"/>
-                  <a:t>firestation</a:t>
+                  <a:t>fire station</a:t>
                 </a:r>
                 <a:r>
                   <a:rPr lang="en-GB"/>

--- a/content/Lectures/Semester 1/Week 06 - Integer Linear Programming - Further Problems/5 Source Files/Week 6 - Integer Linear Programming - Further Problems.pptx
+++ b/content/Lectures/Semester 1/Week 06 - Integer Linear Programming - Further Problems/5 Source Files/Week 6 - Integer Linear Programming - Further Problems.pptx
@@ -28212,31 +28212,12 @@
               <a:p>
                 <a14:m>
                   <m:oMath xmlns:m="http://schemas.openxmlformats.org/officeDocument/2006/math">
-                    <m:sSub>
-                      <m:sSubPr>
-                        <m:ctrlPr>
-                          <a:rPr lang="en-GB" i="1">
-                            <a:latin typeface="Cambria Math" panose="02040503050406030204" pitchFamily="18" charset="0"/>
-                          </a:rPr>
-                        </m:ctrlPr>
-                      </m:sSubPr>
-                      <m:e>
-                        <m:r>
-                          <a:rPr lang="en-GB" i="1">
-                            <a:latin typeface="Cambria Math" panose="02040503050406030204" pitchFamily="18" charset="0"/>
-                          </a:rPr>
-                          <m:t>𝑠</m:t>
-                        </m:r>
-                      </m:e>
-                      <m:sub>
-                        <m:r>
-                          <a:rPr lang="en-GB" i="1">
-                            <a:latin typeface="Cambria Math" panose="02040503050406030204" pitchFamily="18" charset="0"/>
-                          </a:rPr>
-                          <m:t>𝑖</m:t>
-                        </m:r>
-                      </m:sub>
-                    </m:sSub>
+                    <m:r>
+                      <a:rPr lang="en-GB" i="1">
+                        <a:latin typeface="Cambria Math" panose="02040503050406030204" pitchFamily="18" charset="0"/>
+                      </a:rPr>
+                      <m:t>𝑡</m:t>
+                    </m:r>
                     <m:r>
                       <a:rPr lang="en-GB" i="1">
                         <a:latin typeface="Cambria Math" panose="02040503050406030204" pitchFamily="18" charset="0"/>
@@ -28269,7 +28250,7 @@
                       <a:rPr lang="en-GB" i="1">
                         <a:latin typeface="Cambria Math" panose="02040503050406030204" pitchFamily="18" charset="0"/>
                       </a:rPr>
-                      <m:t>𝑖</m:t>
+                      <m:t>𝑡</m:t>
                     </m:r>
                   </m:oMath>
                 </a14:m>
@@ -28301,7 +28282,7 @@
                           <a:rPr lang="en-GB" i="1" dirty="0">
                             <a:latin typeface="Cambria Math" panose="02040503050406030204" pitchFamily="18" charset="0"/>
                           </a:rPr>
-                          <m:t>𝑖</m:t>
+                          <m:t>𝑡</m:t>
                         </m:r>
                       </m:sub>
                     </m:sSub>
@@ -28325,7 +28306,7 @@
                       <a:rPr lang="en-GB" i="1">
                         <a:latin typeface="Cambria Math" panose="02040503050406030204" pitchFamily="18" charset="0"/>
                       </a:rPr>
-                      <m:t>𝑖</m:t>
+                      <m:t>𝑡</m:t>
                     </m:r>
                   </m:oMath>
                 </a14:m>
@@ -28358,7 +28339,7 @@
                           <a:rPr lang="en-GB" i="1">
                             <a:latin typeface="Cambria Math" panose="02040503050406030204" pitchFamily="18" charset="0"/>
                           </a:rPr>
-                          <m:t>𝑖</m:t>
+                          <m:t>𝑡</m:t>
                         </m:r>
                       </m:sub>
                     </m:sSub>
@@ -28382,7 +28363,7 @@
                       <a:rPr lang="en-GB" i="1">
                         <a:latin typeface="Cambria Math" panose="02040503050406030204" pitchFamily="18" charset="0"/>
                       </a:rPr>
-                      <m:t>𝑖</m:t>
+                      <m:t>𝑡</m:t>
                     </m:r>
                   </m:oMath>
                 </a14:m>
@@ -29251,31 +29232,12 @@
               <a:p>
                 <a14:m>
                   <m:oMath xmlns:m="http://schemas.openxmlformats.org/officeDocument/2006/math">
-                    <m:sSub>
-                      <m:sSubPr>
-                        <m:ctrlPr>
-                          <a:rPr lang="en-GB" b="0" i="1" smtClean="0">
-                            <a:latin typeface="Cambria Math" panose="02040503050406030204" pitchFamily="18" charset="0"/>
-                          </a:rPr>
-                        </m:ctrlPr>
-                      </m:sSubPr>
-                      <m:e>
-                        <m:r>
-                          <a:rPr lang="en-GB" b="0" i="1" smtClean="0">
-                            <a:latin typeface="Cambria Math" panose="02040503050406030204" pitchFamily="18" charset="0"/>
-                          </a:rPr>
-                          <m:t>𝑠</m:t>
-                        </m:r>
-                      </m:e>
-                      <m:sub>
-                        <m:r>
-                          <a:rPr lang="en-GB" b="0" i="1" smtClean="0">
-                            <a:latin typeface="Cambria Math" panose="02040503050406030204" pitchFamily="18" charset="0"/>
-                          </a:rPr>
-                          <m:t>𝑖</m:t>
-                        </m:r>
-                      </m:sub>
-                    </m:sSub>
+                    <m:r>
+                      <a:rPr lang="en-GB" b="0" i="1" smtClean="0">
+                        <a:latin typeface="Cambria Math" panose="02040503050406030204" pitchFamily="18" charset="0"/>
+                      </a:rPr>
+                      <m:t>𝑡</m:t>
+                    </m:r>
                     <m:r>
                       <a:rPr lang="en-GB" i="1">
                         <a:latin typeface="Cambria Math" panose="02040503050406030204" pitchFamily="18" charset="0"/>
@@ -29308,7 +29270,7 @@
                       <a:rPr lang="en-GB" b="0" i="1" smtClean="0">
                         <a:latin typeface="Cambria Math" panose="02040503050406030204" pitchFamily="18" charset="0"/>
                       </a:rPr>
-                      <m:t>𝑖</m:t>
+                      <m:t>𝑡</m:t>
                     </m:r>
                   </m:oMath>
                 </a14:m>
@@ -29340,7 +29302,7 @@
                           <a:rPr lang="en-GB" b="0" i="1" dirty="0" smtClean="0">
                             <a:latin typeface="Cambria Math" panose="02040503050406030204" pitchFamily="18" charset="0"/>
                           </a:rPr>
-                          <m:t>𝑖</m:t>
+                          <m:t>𝑡</m:t>
                         </m:r>
                       </m:sub>
                     </m:sSub>
@@ -29364,7 +29326,7 @@
                       <a:rPr lang="en-GB" b="0" i="1" smtClean="0">
                         <a:latin typeface="Cambria Math" panose="02040503050406030204" pitchFamily="18" charset="0"/>
                       </a:rPr>
-                      <m:t>𝑖</m:t>
+                      <m:t>𝑡</m:t>
                     </m:r>
                   </m:oMath>
                 </a14:m>
@@ -29397,7 +29359,7 @@
                           <a:rPr lang="en-GB" i="1" smtClean="0">
                             <a:latin typeface="Cambria Math" panose="02040503050406030204" pitchFamily="18" charset="0"/>
                           </a:rPr>
-                          <m:t>𝑖</m:t>
+                          <m:t>𝑡</m:t>
                         </m:r>
                       </m:sub>
                     </m:sSub>
@@ -29421,7 +29383,7 @@
                       <a:rPr lang="en-GB" i="1">
                         <a:latin typeface="Cambria Math" panose="02040503050406030204" pitchFamily="18" charset="0"/>
                       </a:rPr>
-                      <m:t>𝑖</m:t>
+                      <m:t>𝑡</m:t>
                     </m:r>
                   </m:oMath>
                 </a14:m>
@@ -31474,31 +31436,12 @@
               <a:p>
                 <a14:m>
                   <m:oMath xmlns:m="http://schemas.openxmlformats.org/officeDocument/2006/math">
-                    <m:sSub>
-                      <m:sSubPr>
-                        <m:ctrlPr>
-                          <a:rPr lang="en-GB" i="1">
-                            <a:latin typeface="Cambria Math" panose="02040503050406030204" pitchFamily="18" charset="0"/>
-                          </a:rPr>
-                        </m:ctrlPr>
-                      </m:sSubPr>
-                      <m:e>
-                        <m:r>
-                          <a:rPr lang="en-GB" i="1">
-                            <a:latin typeface="Cambria Math" panose="02040503050406030204" pitchFamily="18" charset="0"/>
-                          </a:rPr>
-                          <m:t>𝑠</m:t>
-                        </m:r>
-                      </m:e>
-                      <m:sub>
-                        <m:r>
-                          <a:rPr lang="en-GB" i="1">
-                            <a:latin typeface="Cambria Math" panose="02040503050406030204" pitchFamily="18" charset="0"/>
-                          </a:rPr>
-                          <m:t>𝑖</m:t>
-                        </m:r>
-                      </m:sub>
-                    </m:sSub>
+                    <m:r>
+                      <a:rPr lang="en-GB" i="1">
+                        <a:latin typeface="Cambria Math" panose="02040503050406030204" pitchFamily="18" charset="0"/>
+                      </a:rPr>
+                      <m:t>𝑡</m:t>
+                    </m:r>
                     <m:r>
                       <a:rPr lang="en-GB" i="1">
                         <a:latin typeface="Cambria Math" panose="02040503050406030204" pitchFamily="18" charset="0"/>
@@ -31527,31 +31470,12 @@
                 </a:r>
                 <a14:m>
                   <m:oMath xmlns:m="http://schemas.openxmlformats.org/officeDocument/2006/math">
-                    <m:sSub>
-                      <m:sSubPr>
-                        <m:ctrlPr>
-                          <a:rPr lang="en-GB" i="1">
-                            <a:latin typeface="Cambria Math" panose="02040503050406030204" pitchFamily="18" charset="0"/>
-                          </a:rPr>
-                        </m:ctrlPr>
-                      </m:sSubPr>
-                      <m:e>
-                        <m:r>
-                          <a:rPr lang="en-GB" i="1">
-                            <a:latin typeface="Cambria Math" panose="02040503050406030204" pitchFamily="18" charset="0"/>
-                          </a:rPr>
-                          <m:t>𝑠</m:t>
-                        </m:r>
-                      </m:e>
-                      <m:sub>
-                        <m:r>
-                          <a:rPr lang="en-GB" i="1">
-                            <a:latin typeface="Cambria Math" panose="02040503050406030204" pitchFamily="18" charset="0"/>
-                          </a:rPr>
-                          <m:t>𝑖</m:t>
-                        </m:r>
-                      </m:sub>
-                    </m:sSub>
+                    <m:r>
+                      <a:rPr lang="en-GB" i="1">
+                        <a:latin typeface="Cambria Math" panose="02040503050406030204" pitchFamily="18" charset="0"/>
+                      </a:rPr>
+                      <m:t>𝑡</m:t>
+                    </m:r>
                   </m:oMath>
                 </a14:m>
                 <a:endParaRPr lang="en-GB" i="1">
@@ -31582,7 +31506,7 @@
                           <a:rPr lang="en-GB" i="1" dirty="0">
                             <a:latin typeface="Cambria Math" panose="02040503050406030204" pitchFamily="18" charset="0"/>
                           </a:rPr>
-                          <m:t>𝑖</m:t>
+                          <m:t>𝑡</m:t>
                         </m:r>
                       </m:sub>
                     </m:sSub>
@@ -31602,31 +31526,12 @@
                 </a:r>
                 <a14:m>
                   <m:oMath xmlns:m="http://schemas.openxmlformats.org/officeDocument/2006/math">
-                    <m:sSub>
-                      <m:sSubPr>
-                        <m:ctrlPr>
-                          <a:rPr lang="en-GB" i="1">
-                            <a:latin typeface="Cambria Math" panose="02040503050406030204" pitchFamily="18" charset="0"/>
-                          </a:rPr>
-                        </m:ctrlPr>
-                      </m:sSubPr>
-                      <m:e>
-                        <m:r>
-                          <a:rPr lang="en-GB" i="1">
-                            <a:latin typeface="Cambria Math" panose="02040503050406030204" pitchFamily="18" charset="0"/>
-                          </a:rPr>
-                          <m:t>𝑠</m:t>
-                        </m:r>
-                      </m:e>
-                      <m:sub>
-                        <m:r>
-                          <a:rPr lang="en-GB" i="1">
-                            <a:latin typeface="Cambria Math" panose="02040503050406030204" pitchFamily="18" charset="0"/>
-                          </a:rPr>
-                          <m:t>𝑖</m:t>
-                        </m:r>
-                      </m:sub>
-                    </m:sSub>
+                    <m:r>
+                      <a:rPr lang="en-GB" i="1">
+                        <a:latin typeface="Cambria Math" panose="02040503050406030204" pitchFamily="18" charset="0"/>
+                      </a:rPr>
+                      <m:t>𝑡</m:t>
+                    </m:r>
                   </m:oMath>
                 </a14:m>
                 <a:r>
@@ -31658,7 +31563,7 @@
                           <a:rPr lang="en-GB" i="1">
                             <a:latin typeface="Cambria Math" panose="02040503050406030204" pitchFamily="18" charset="0"/>
                           </a:rPr>
-                          <m:t>𝑖</m:t>
+                          <m:t>𝑡</m:t>
                         </m:r>
                       </m:sub>
                     </m:sSub>
@@ -31682,7 +31587,7 @@
                       <a:rPr lang="en-GB" i="1">
                         <a:latin typeface="Cambria Math" panose="02040503050406030204" pitchFamily="18" charset="0"/>
                       </a:rPr>
-                      <m:t>𝑖</m:t>
+                      <m:t>𝑡</m:t>
                     </m:r>
                   </m:oMath>
                 </a14:m>
